--- a/protected-downloads/praesentation/TL00.pptx
+++ b/protected-downloads/praesentation/TL00.pptx
@@ -590,6 +590,11 @@
         <p:txBody>
           <a:bodyPr/>
           <a:lstStyle/>
+          <a:p>
+            <a:r>
+              <a:t>REGIE-HINWEIS zur Reihenfolge: Die Methoden-Einführung Kollegiale Fallberatung (Sechs-Schritte, Block V) kommt laut Ablaufplan Sec 3.1 VOR diesem Fall (10:35–10:45). Die Fallberatungs-Folien folgen im Deck erst danach, damit der Thomas-K.-Fall die Methode motiviert – die kurze Flipchart-Einführung selbst erfolgt aber bereits vor diesem Block.</a:t>
+            </a:r>
+          </a:p>
           <a:p>
             <a:r>
               <a:t>Ausgangslage laut vorlesen – gemeinsame Szene schaffen. Situationen gezielt verteilen: B2 immer der erfahrensten Gruppe oder ans Plenum.</a:t>
@@ -10853,7 +10858,7 @@
                 </a:solidFill>
                 <a:latin typeface="Consolas"/>
               </a:rPr>
-              <a:t>12:15–12:45 (30 Min.)</a:t>
+              <a:t>12:15–12:40 (25 Min.)</a:t>
             </a:r>
             <a:r>
               <a:rPr sz="1200" b="1">
@@ -10890,7 +10895,7 @@
                 </a:solidFill>
                 <a:latin typeface="Consolas"/>
               </a:rPr>
-              <a:t>12:45–13:00 (15 Min.)</a:t>
+              <a:t>12:40–13:00 (20 Min.)</a:t>
             </a:r>
             <a:r>
               <a:rPr sz="1200" b="1">
